--- a/koreatech-db/weeks/15주차_총정리와_기말고사.pptx
+++ b/koreatech-db/weeks/15주차_총정리와_기말고사.pptx
@@ -4174,9 +4174,9 @@
                 <a:solidFill>
                   <a:srgbClr val="7A869C"/>
                 </a:solidFill>
-                <a:latin typeface="나눔고딕코딩"/>
-                <a:ea typeface="나눔고딕코딩"/>
-                <a:cs typeface="나눔고딕코딩"/>
+                <a:latin typeface="D2Coding"/>
+                <a:ea typeface="D2Coding"/>
+                <a:cs typeface="D2Coding"/>
               </a:rPr>
               <a:t>1</a:t>
             </a:r>
@@ -4192,9 +4192,9 @@
                 <a:solidFill>
                   <a:srgbClr val="7A869C"/>
                 </a:solidFill>
-                <a:latin typeface="나눔고딕코딩"/>
-                <a:ea typeface="나눔고딕코딩"/>
-                <a:cs typeface="나눔고딕코딩"/>
+                <a:latin typeface="D2Coding"/>
+                <a:ea typeface="D2Coding"/>
+                <a:cs typeface="D2Coding"/>
               </a:rPr>
               <a:t>2</a:t>
             </a:r>
@@ -4210,9 +4210,9 @@
                 <a:solidFill>
                   <a:srgbClr val="7A869C"/>
                 </a:solidFill>
-                <a:latin typeface="나눔고딕코딩"/>
-                <a:ea typeface="나눔고딕코딩"/>
-                <a:cs typeface="나눔고딕코딩"/>
+                <a:latin typeface="D2Coding"/>
+                <a:ea typeface="D2Coding"/>
+                <a:cs typeface="D2Coding"/>
               </a:rPr>
               <a:t>3</a:t>
             </a:r>
@@ -4228,9 +4228,9 @@
                 <a:solidFill>
                   <a:srgbClr val="7A869C"/>
                 </a:solidFill>
-                <a:latin typeface="나눔고딕코딩"/>
-                <a:ea typeface="나눔고딕코딩"/>
-                <a:cs typeface="나눔고딕코딩"/>
+                <a:latin typeface="D2Coding"/>
+                <a:ea typeface="D2Coding"/>
+                <a:cs typeface="D2Coding"/>
               </a:rPr>
               <a:t>4</a:t>
             </a:r>
@@ -4246,9 +4246,9 @@
                 <a:solidFill>
                   <a:srgbClr val="7A869C"/>
                 </a:solidFill>
-                <a:latin typeface="나눔고딕코딩"/>
-                <a:ea typeface="나눔고딕코딩"/>
-                <a:cs typeface="나눔고딕코딩"/>
+                <a:latin typeface="D2Coding"/>
+                <a:ea typeface="D2Coding"/>
+                <a:cs typeface="D2Coding"/>
               </a:rPr>
               <a:t>5</a:t>
             </a:r>
@@ -4264,9 +4264,9 @@
                 <a:solidFill>
                   <a:srgbClr val="7A869C"/>
                 </a:solidFill>
-                <a:latin typeface="나눔고딕코딩"/>
-                <a:ea typeface="나눔고딕코딩"/>
-                <a:cs typeface="나눔고딕코딩"/>
+                <a:latin typeface="D2Coding"/>
+                <a:ea typeface="D2Coding"/>
+                <a:cs typeface="D2Coding"/>
               </a:rPr>
               <a:t>6</a:t>
             </a:r>
@@ -4282,9 +4282,9 @@
                 <a:solidFill>
                   <a:srgbClr val="7A869C"/>
                 </a:solidFill>
-                <a:latin typeface="나눔고딕코딩"/>
-                <a:ea typeface="나눔고딕코딩"/>
-                <a:cs typeface="나눔고딕코딩"/>
+                <a:latin typeface="D2Coding"/>
+                <a:ea typeface="D2Coding"/>
+                <a:cs typeface="D2Coding"/>
               </a:rPr>
               <a:t>7</a:t>
             </a:r>
@@ -4300,9 +4300,9 @@
                 <a:solidFill>
                   <a:srgbClr val="7A869C"/>
                 </a:solidFill>
-                <a:latin typeface="나눔고딕코딩"/>
-                <a:ea typeface="나눔고딕코딩"/>
-                <a:cs typeface="나눔고딕코딩"/>
+                <a:latin typeface="D2Coding"/>
+                <a:ea typeface="D2Coding"/>
+                <a:cs typeface="D2Coding"/>
               </a:rPr>
               <a:t>8</a:t>
             </a:r>
@@ -4341,9 +4341,9 @@
                 <a:solidFill>
                   <a:srgbClr val="E6EAF2"/>
                 </a:solidFill>
-                <a:latin typeface="나눔고딕코딩"/>
-                <a:ea typeface="나눔고딕코딩"/>
-                <a:cs typeface="나눔고딕코딩"/>
+                <a:latin typeface="D2Coding"/>
+                <a:ea typeface="D2Coding"/>
+                <a:cs typeface="D2Coding"/>
               </a:rPr>
               <a:t>SELECT category,</a:t>
             </a:r>
@@ -4359,9 +4359,9 @@
                 <a:solidFill>
                   <a:srgbClr val="E6EAF2"/>
                 </a:solidFill>
-                <a:latin typeface="나눔고딕코딩"/>
-                <a:ea typeface="나눔고딕코딩"/>
-                <a:cs typeface="나눔고딕코딩"/>
+                <a:latin typeface="D2Coding"/>
+                <a:ea typeface="D2Coding"/>
+                <a:cs typeface="D2Coding"/>
               </a:rPr>
               <a:t>       COUNT(*)          AS 상품수,</a:t>
             </a:r>
@@ -4377,9 +4377,9 @@
                 <a:solidFill>
                   <a:srgbClr val="E6EAF2"/>
                 </a:solidFill>
-                <a:latin typeface="나눔고딕코딩"/>
-                <a:ea typeface="나눔고딕코딩"/>
-                <a:cs typeface="나눔고딕코딩"/>
+                <a:latin typeface="D2Coding"/>
+                <a:ea typeface="D2Coding"/>
+                <a:cs typeface="D2Coding"/>
               </a:rPr>
               <a:t>       ROUND(AVG(price)) AS 평균가</a:t>
             </a:r>
@@ -4395,9 +4395,9 @@
                 <a:solidFill>
                   <a:srgbClr val="E6EAF2"/>
                 </a:solidFill>
-                <a:latin typeface="나눔고딕코딩"/>
-                <a:ea typeface="나눔고딕코딩"/>
-                <a:cs typeface="나눔고딕코딩"/>
+                <a:latin typeface="D2Coding"/>
+                <a:ea typeface="D2Coding"/>
+                <a:cs typeface="D2Coding"/>
               </a:rPr>
               <a:t>FROM   products</a:t>
             </a:r>
@@ -4413,9 +4413,9 @@
                 <a:solidFill>
                   <a:srgbClr val="E6EAF2"/>
                 </a:solidFill>
-                <a:latin typeface="나눔고딕코딩"/>
-                <a:ea typeface="나눔고딕코딩"/>
-                <a:cs typeface="나눔고딕코딩"/>
+                <a:latin typeface="D2Coding"/>
+                <a:ea typeface="D2Coding"/>
+                <a:cs typeface="D2Coding"/>
               </a:rPr>
               <a:t>WHERE  stock &gt; 0</a:t>
             </a:r>
@@ -4431,9 +4431,9 @@
                 <a:solidFill>
                   <a:srgbClr val="E6EAF2"/>
                 </a:solidFill>
-                <a:latin typeface="나눔고딕코딩"/>
-                <a:ea typeface="나눔고딕코딩"/>
-                <a:cs typeface="나눔고딕코딩"/>
+                <a:latin typeface="D2Coding"/>
+                <a:ea typeface="D2Coding"/>
+                <a:cs typeface="D2Coding"/>
               </a:rPr>
               <a:t>GROUP  BY category</a:t>
             </a:r>
@@ -4449,9 +4449,9 @@
                 <a:solidFill>
                   <a:srgbClr val="E6EAF2"/>
                 </a:solidFill>
-                <a:latin typeface="나눔고딕코딩"/>
-                <a:ea typeface="나눔고딕코딩"/>
-                <a:cs typeface="나눔고딕코딩"/>
+                <a:latin typeface="D2Coding"/>
+                <a:ea typeface="D2Coding"/>
+                <a:cs typeface="D2Coding"/>
               </a:rPr>
               <a:t>HAVING COUNT(*) &gt;= 2</a:t>
             </a:r>
@@ -4467,9 +4467,9 @@
                 <a:solidFill>
                   <a:srgbClr val="E6EAF2"/>
                 </a:solidFill>
-                <a:latin typeface="나눔고딕코딩"/>
-                <a:ea typeface="나눔고딕코딩"/>
-                <a:cs typeface="나눔고딕코딩"/>
+                <a:latin typeface="D2Coding"/>
+                <a:ea typeface="D2Coding"/>
+                <a:cs typeface="D2Coding"/>
               </a:rPr>
               <a:t>ORDER  BY 평균가 DESC;</a:t>
             </a:r>
@@ -6657,9 +6657,9 @@
                 <a:solidFill>
                   <a:srgbClr val="7A869C"/>
                 </a:solidFill>
-                <a:latin typeface="나눔고딕코딩"/>
-                <a:ea typeface="나눔고딕코딩"/>
-                <a:cs typeface="나눔고딕코딩"/>
+                <a:latin typeface="D2Coding"/>
+                <a:ea typeface="D2Coding"/>
+                <a:cs typeface="D2Coding"/>
               </a:rPr>
               <a:t>1</a:t>
             </a:r>
@@ -6675,9 +6675,9 @@
                 <a:solidFill>
                   <a:srgbClr val="7A869C"/>
                 </a:solidFill>
-                <a:latin typeface="나눔고딕코딩"/>
-                <a:ea typeface="나눔고딕코딩"/>
-                <a:cs typeface="나눔고딕코딩"/>
+                <a:latin typeface="D2Coding"/>
+                <a:ea typeface="D2Coding"/>
+                <a:cs typeface="D2Coding"/>
               </a:rPr>
               <a:t>2</a:t>
             </a:r>
@@ -6693,9 +6693,9 @@
                 <a:solidFill>
                   <a:srgbClr val="7A869C"/>
                 </a:solidFill>
-                <a:latin typeface="나눔고딕코딩"/>
-                <a:ea typeface="나눔고딕코딩"/>
-                <a:cs typeface="나눔고딕코딩"/>
+                <a:latin typeface="D2Coding"/>
+                <a:ea typeface="D2Coding"/>
+                <a:cs typeface="D2Coding"/>
               </a:rPr>
               <a:t>3</a:t>
             </a:r>
@@ -6711,9 +6711,9 @@
                 <a:solidFill>
                   <a:srgbClr val="7A869C"/>
                 </a:solidFill>
-                <a:latin typeface="나눔고딕코딩"/>
-                <a:ea typeface="나눔고딕코딩"/>
-                <a:cs typeface="나눔고딕코딩"/>
+                <a:latin typeface="D2Coding"/>
+                <a:ea typeface="D2Coding"/>
+                <a:cs typeface="D2Coding"/>
               </a:rPr>
               <a:t>4</a:t>
             </a:r>
@@ -6729,9 +6729,9 @@
                 <a:solidFill>
                   <a:srgbClr val="7A869C"/>
                 </a:solidFill>
-                <a:latin typeface="나눔고딕코딩"/>
-                <a:ea typeface="나눔고딕코딩"/>
-                <a:cs typeface="나눔고딕코딩"/>
+                <a:latin typeface="D2Coding"/>
+                <a:ea typeface="D2Coding"/>
+                <a:cs typeface="D2Coding"/>
               </a:rPr>
               <a:t>5</a:t>
             </a:r>
@@ -6747,9 +6747,9 @@
                 <a:solidFill>
                   <a:srgbClr val="7A869C"/>
                 </a:solidFill>
-                <a:latin typeface="나눔고딕코딩"/>
-                <a:ea typeface="나눔고딕코딩"/>
-                <a:cs typeface="나눔고딕코딩"/>
+                <a:latin typeface="D2Coding"/>
+                <a:ea typeface="D2Coding"/>
+                <a:cs typeface="D2Coding"/>
               </a:rPr>
               <a:t>6</a:t>
             </a:r>
@@ -6765,9 +6765,9 @@
                 <a:solidFill>
                   <a:srgbClr val="7A869C"/>
                 </a:solidFill>
-                <a:latin typeface="나눔고딕코딩"/>
-                <a:ea typeface="나눔고딕코딩"/>
-                <a:cs typeface="나눔고딕코딩"/>
+                <a:latin typeface="D2Coding"/>
+                <a:ea typeface="D2Coding"/>
+                <a:cs typeface="D2Coding"/>
               </a:rPr>
               <a:t>7</a:t>
             </a:r>
@@ -6783,9 +6783,9 @@
                 <a:solidFill>
                   <a:srgbClr val="7A869C"/>
                 </a:solidFill>
-                <a:latin typeface="나눔고딕코딩"/>
-                <a:ea typeface="나눔고딕코딩"/>
-                <a:cs typeface="나눔고딕코딩"/>
+                <a:latin typeface="D2Coding"/>
+                <a:ea typeface="D2Coding"/>
+                <a:cs typeface="D2Coding"/>
               </a:rPr>
               <a:t>8</a:t>
             </a:r>
@@ -6801,9 +6801,9 @@
                 <a:solidFill>
                   <a:srgbClr val="7A869C"/>
                 </a:solidFill>
-                <a:latin typeface="나눔고딕코딩"/>
-                <a:ea typeface="나눔고딕코딩"/>
-                <a:cs typeface="나눔고딕코딩"/>
+                <a:latin typeface="D2Coding"/>
+                <a:ea typeface="D2Coding"/>
+                <a:cs typeface="D2Coding"/>
               </a:rPr>
               <a:t>9</a:t>
             </a:r>
@@ -6819,9 +6819,9 @@
                 <a:solidFill>
                   <a:srgbClr val="7A869C"/>
                 </a:solidFill>
-                <a:latin typeface="나눔고딕코딩"/>
-                <a:ea typeface="나눔고딕코딩"/>
-                <a:cs typeface="나눔고딕코딩"/>
+                <a:latin typeface="D2Coding"/>
+                <a:ea typeface="D2Coding"/>
+                <a:cs typeface="D2Coding"/>
               </a:rPr>
               <a:t>10</a:t>
             </a:r>
@@ -6837,9 +6837,9 @@
                 <a:solidFill>
                   <a:srgbClr val="7A869C"/>
                 </a:solidFill>
-                <a:latin typeface="나눔고딕코딩"/>
-                <a:ea typeface="나눔고딕코딩"/>
-                <a:cs typeface="나눔고딕코딩"/>
+                <a:latin typeface="D2Coding"/>
+                <a:ea typeface="D2Coding"/>
+                <a:cs typeface="D2Coding"/>
               </a:rPr>
               <a:t>11</a:t>
             </a:r>
@@ -6855,9 +6855,9 @@
                 <a:solidFill>
                   <a:srgbClr val="7A869C"/>
                 </a:solidFill>
-                <a:latin typeface="나눔고딕코딩"/>
-                <a:ea typeface="나눔고딕코딩"/>
-                <a:cs typeface="나눔고딕코딩"/>
+                <a:latin typeface="D2Coding"/>
+                <a:ea typeface="D2Coding"/>
+                <a:cs typeface="D2Coding"/>
               </a:rPr>
               <a:t>12</a:t>
             </a:r>
@@ -6896,9 +6896,9 @@
                 <a:solidFill>
                   <a:srgbClr val="E6EAF2"/>
                 </a:solidFill>
-                <a:latin typeface="나눔고딕코딩"/>
-                <a:ea typeface="나눔고딕코딩"/>
-                <a:cs typeface="나눔고딕코딩"/>
+                <a:latin typeface="D2Coding"/>
+                <a:ea typeface="D2Coding"/>
+                <a:cs typeface="D2Coding"/>
               </a:rPr>
               <a:t>SELECT o.order_id, c.name</a:t>
             </a:r>
@@ -6914,9 +6914,9 @@
                 <a:solidFill>
                   <a:srgbClr val="E6EAF2"/>
                 </a:solidFill>
-                <a:latin typeface="나눔고딕코딩"/>
-                <a:ea typeface="나눔고딕코딩"/>
-                <a:cs typeface="나눔고딕코딩"/>
+                <a:latin typeface="D2Coding"/>
+                <a:ea typeface="D2Coding"/>
+                <a:cs typeface="D2Coding"/>
               </a:rPr>
               <a:t>FROM   orders o</a:t>
             </a:r>
@@ -6932,9 +6932,9 @@
                 <a:solidFill>
                   <a:srgbClr val="E6EAF2"/>
                 </a:solidFill>
-                <a:latin typeface="나눔고딕코딩"/>
-                <a:ea typeface="나눔고딕코딩"/>
-                <a:cs typeface="나눔고딕코딩"/>
+                <a:latin typeface="D2Coding"/>
+                <a:ea typeface="D2Coding"/>
+                <a:cs typeface="D2Coding"/>
               </a:rPr>
               <a:t>JOIN   customers c ON o.cust_id = c.cust_id;</a:t>
             </a:r>
@@ -6950,9 +6950,9 @@
                 <a:solidFill>
                   <a:srgbClr val="E6EAF2"/>
                 </a:solidFill>
-                <a:latin typeface="나눔고딕코딩"/>
-                <a:ea typeface="나눔고딕코딩"/>
-                <a:cs typeface="나눔고딕코딩"/>
+                <a:latin typeface="D2Coding"/>
+                <a:ea typeface="D2Coding"/>
+                <a:cs typeface="D2Coding"/>
               </a:rPr>
               <a:t/>
             </a:r>
@@ -6968,9 +6968,9 @@
                 <a:solidFill>
                   <a:srgbClr val="E6EAF2"/>
                 </a:solidFill>
-                <a:latin typeface="나눔고딕코딩"/>
-                <a:ea typeface="나눔고딕코딩"/>
-                <a:cs typeface="나눔고딕코딩"/>
+                <a:latin typeface="D2Coding"/>
+                <a:ea typeface="D2Coding"/>
+                <a:cs typeface="D2Coding"/>
               </a:rPr>
               <a:t>SELECT c.name, o.order_id</a:t>
             </a:r>
@@ -6986,9 +6986,9 @@
                 <a:solidFill>
                   <a:srgbClr val="E6EAF2"/>
                 </a:solidFill>
-                <a:latin typeface="나눔고딕코딩"/>
-                <a:ea typeface="나눔고딕코딩"/>
-                <a:cs typeface="나눔고딕코딩"/>
+                <a:latin typeface="D2Coding"/>
+                <a:ea typeface="D2Coding"/>
+                <a:cs typeface="D2Coding"/>
               </a:rPr>
               <a:t>FROM   customers c</a:t>
             </a:r>
@@ -7004,9 +7004,9 @@
                 <a:solidFill>
                   <a:srgbClr val="E6EAF2"/>
                 </a:solidFill>
-                <a:latin typeface="나눔고딕코딩"/>
-                <a:ea typeface="나눔고딕코딩"/>
-                <a:cs typeface="나눔고딕코딩"/>
+                <a:latin typeface="D2Coding"/>
+                <a:ea typeface="D2Coding"/>
+                <a:cs typeface="D2Coding"/>
               </a:rPr>
               <a:t>LEFT   JOIN orders o ON c.cust_id = o.cust_id;</a:t>
             </a:r>
@@ -7022,9 +7022,9 @@
                 <a:solidFill>
                   <a:srgbClr val="E6EAF2"/>
                 </a:solidFill>
-                <a:latin typeface="나눔고딕코딩"/>
-                <a:ea typeface="나눔고딕코딩"/>
-                <a:cs typeface="나눔고딕코딩"/>
+                <a:latin typeface="D2Coding"/>
+                <a:ea typeface="D2Coding"/>
+                <a:cs typeface="D2Coding"/>
               </a:rPr>
               <a:t/>
             </a:r>
@@ -7040,9 +7040,9 @@
                 <a:solidFill>
                   <a:srgbClr val="E6EAF2"/>
                 </a:solidFill>
-                <a:latin typeface="나눔고딕코딩"/>
-                <a:ea typeface="나눔고딕코딩"/>
-                <a:cs typeface="나눔고딕코딩"/>
+                <a:latin typeface="D2Coding"/>
+                <a:ea typeface="D2Coding"/>
+                <a:cs typeface="D2Coding"/>
               </a:rPr>
               <a:t>SELECT c.name</a:t>
             </a:r>
@@ -7058,9 +7058,9 @@
                 <a:solidFill>
                   <a:srgbClr val="E6EAF2"/>
                 </a:solidFill>
-                <a:latin typeface="나눔고딕코딩"/>
-                <a:ea typeface="나눔고딕코딩"/>
-                <a:cs typeface="나눔고딕코딩"/>
+                <a:latin typeface="D2Coding"/>
+                <a:ea typeface="D2Coding"/>
+                <a:cs typeface="D2Coding"/>
               </a:rPr>
               <a:t>FROM   customers c</a:t>
             </a:r>
@@ -7076,9 +7076,9 @@
                 <a:solidFill>
                   <a:srgbClr val="E6EAF2"/>
                 </a:solidFill>
-                <a:latin typeface="나눔고딕코딩"/>
-                <a:ea typeface="나눔고딕코딩"/>
-                <a:cs typeface="나눔고딕코딩"/>
+                <a:latin typeface="D2Coding"/>
+                <a:ea typeface="D2Coding"/>
+                <a:cs typeface="D2Coding"/>
               </a:rPr>
               <a:t>LEFT   JOIN orders o ON c.cust_id = o.cust_id</a:t>
             </a:r>
@@ -7094,9 +7094,9 @@
                 <a:solidFill>
                   <a:srgbClr val="E6EAF2"/>
                 </a:solidFill>
-                <a:latin typeface="나눔고딕코딩"/>
-                <a:ea typeface="나눔고딕코딩"/>
-                <a:cs typeface="나눔고딕코딩"/>
+                <a:latin typeface="D2Coding"/>
+                <a:ea typeface="D2Coding"/>
+                <a:cs typeface="D2Coding"/>
               </a:rPr>
               <a:t>WHERE  o.order_id IS NULL;</a:t>
             </a:r>
@@ -8968,9 +8968,9 @@
                 <a:solidFill>
                   <a:srgbClr val="7A869C"/>
                 </a:solidFill>
-                <a:latin typeface="나눔고딕코딩"/>
-                <a:ea typeface="나눔고딕코딩"/>
-                <a:cs typeface="나눔고딕코딩"/>
+                <a:latin typeface="D2Coding"/>
+                <a:ea typeface="D2Coding"/>
+                <a:cs typeface="D2Coding"/>
               </a:rPr>
               <a:t>1</a:t>
             </a:r>
@@ -8986,9 +8986,9 @@
                 <a:solidFill>
                   <a:srgbClr val="7A869C"/>
                 </a:solidFill>
-                <a:latin typeface="나눔고딕코딩"/>
-                <a:ea typeface="나눔고딕코딩"/>
-                <a:cs typeface="나눔고딕코딩"/>
+                <a:latin typeface="D2Coding"/>
+                <a:ea typeface="D2Coding"/>
+                <a:cs typeface="D2Coding"/>
               </a:rPr>
               <a:t>2</a:t>
             </a:r>
@@ -9004,9 +9004,9 @@
                 <a:solidFill>
                   <a:srgbClr val="7A869C"/>
                 </a:solidFill>
-                <a:latin typeface="나눔고딕코딩"/>
-                <a:ea typeface="나눔고딕코딩"/>
-                <a:cs typeface="나눔고딕코딩"/>
+                <a:latin typeface="D2Coding"/>
+                <a:ea typeface="D2Coding"/>
+                <a:cs typeface="D2Coding"/>
               </a:rPr>
               <a:t>3</a:t>
             </a:r>
@@ -9022,9 +9022,9 @@
                 <a:solidFill>
                   <a:srgbClr val="7A869C"/>
                 </a:solidFill>
-                <a:latin typeface="나눔고딕코딩"/>
-                <a:ea typeface="나눔고딕코딩"/>
-                <a:cs typeface="나눔고딕코딩"/>
+                <a:latin typeface="D2Coding"/>
+                <a:ea typeface="D2Coding"/>
+                <a:cs typeface="D2Coding"/>
               </a:rPr>
               <a:t>4</a:t>
             </a:r>
@@ -9040,9 +9040,9 @@
                 <a:solidFill>
                   <a:srgbClr val="7A869C"/>
                 </a:solidFill>
-                <a:latin typeface="나눔고딕코딩"/>
-                <a:ea typeface="나눔고딕코딩"/>
-                <a:cs typeface="나눔고딕코딩"/>
+                <a:latin typeface="D2Coding"/>
+                <a:ea typeface="D2Coding"/>
+                <a:cs typeface="D2Coding"/>
               </a:rPr>
               <a:t>5</a:t>
             </a:r>
@@ -9058,9 +9058,9 @@
                 <a:solidFill>
                   <a:srgbClr val="7A869C"/>
                 </a:solidFill>
-                <a:latin typeface="나눔고딕코딩"/>
-                <a:ea typeface="나눔고딕코딩"/>
-                <a:cs typeface="나눔고딕코딩"/>
+                <a:latin typeface="D2Coding"/>
+                <a:ea typeface="D2Coding"/>
+                <a:cs typeface="D2Coding"/>
               </a:rPr>
               <a:t>6</a:t>
             </a:r>
@@ -9076,9 +9076,9 @@
                 <a:solidFill>
                   <a:srgbClr val="7A869C"/>
                 </a:solidFill>
-                <a:latin typeface="나눔고딕코딩"/>
-                <a:ea typeface="나눔고딕코딩"/>
-                <a:cs typeface="나눔고딕코딩"/>
+                <a:latin typeface="D2Coding"/>
+                <a:ea typeface="D2Coding"/>
+                <a:cs typeface="D2Coding"/>
               </a:rPr>
               <a:t>7</a:t>
             </a:r>
@@ -9094,9 +9094,9 @@
                 <a:solidFill>
                   <a:srgbClr val="7A869C"/>
                 </a:solidFill>
-                <a:latin typeface="나눔고딕코딩"/>
-                <a:ea typeface="나눔고딕코딩"/>
-                <a:cs typeface="나눔고딕코딩"/>
+                <a:latin typeface="D2Coding"/>
+                <a:ea typeface="D2Coding"/>
+                <a:cs typeface="D2Coding"/>
               </a:rPr>
               <a:t>8</a:t>
             </a:r>
@@ -9112,9 +9112,9 @@
                 <a:solidFill>
                   <a:srgbClr val="7A869C"/>
                 </a:solidFill>
-                <a:latin typeface="나눔고딕코딩"/>
-                <a:ea typeface="나눔고딕코딩"/>
-                <a:cs typeface="나눔고딕코딩"/>
+                <a:latin typeface="D2Coding"/>
+                <a:ea typeface="D2Coding"/>
+                <a:cs typeface="D2Coding"/>
               </a:rPr>
               <a:t>9</a:t>
             </a:r>
@@ -9130,9 +9130,9 @@
                 <a:solidFill>
                   <a:srgbClr val="7A869C"/>
                 </a:solidFill>
-                <a:latin typeface="나눔고딕코딩"/>
-                <a:ea typeface="나눔고딕코딩"/>
-                <a:cs typeface="나눔고딕코딩"/>
+                <a:latin typeface="D2Coding"/>
+                <a:ea typeface="D2Coding"/>
+                <a:cs typeface="D2Coding"/>
               </a:rPr>
               <a:t>10</a:t>
             </a:r>
@@ -9148,9 +9148,9 @@
                 <a:solidFill>
                   <a:srgbClr val="7A869C"/>
                 </a:solidFill>
-                <a:latin typeface="나눔고딕코딩"/>
-                <a:ea typeface="나눔고딕코딩"/>
-                <a:cs typeface="나눔고딕코딩"/>
+                <a:latin typeface="D2Coding"/>
+                <a:ea typeface="D2Coding"/>
+                <a:cs typeface="D2Coding"/>
               </a:rPr>
               <a:t>11</a:t>
             </a:r>
@@ -9166,9 +9166,9 @@
                 <a:solidFill>
                   <a:srgbClr val="7A869C"/>
                 </a:solidFill>
-                <a:latin typeface="나눔고딕코딩"/>
-                <a:ea typeface="나눔고딕코딩"/>
-                <a:cs typeface="나눔고딕코딩"/>
+                <a:latin typeface="D2Coding"/>
+                <a:ea typeface="D2Coding"/>
+                <a:cs typeface="D2Coding"/>
               </a:rPr>
               <a:t>12</a:t>
             </a:r>
@@ -9207,9 +9207,9 @@
                 <a:solidFill>
                   <a:srgbClr val="E6EAF2"/>
                 </a:solidFill>
-                <a:latin typeface="나눔고딕코딩"/>
-                <a:ea typeface="나눔고딕코딩"/>
-                <a:cs typeface="나눔고딕코딩"/>
+                <a:latin typeface="D2Coding"/>
+                <a:ea typeface="D2Coding"/>
+                <a:cs typeface="D2Coding"/>
               </a:rPr>
               <a:t>SELECT name, price FROM products</a:t>
             </a:r>
@@ -9225,9 +9225,9 @@
                 <a:solidFill>
                   <a:srgbClr val="E6EAF2"/>
                 </a:solidFill>
-                <a:latin typeface="나눔고딕코딩"/>
-                <a:ea typeface="나눔고딕코딩"/>
-                <a:cs typeface="나눔고딕코딩"/>
+                <a:latin typeface="D2Coding"/>
+                <a:ea typeface="D2Coding"/>
+                <a:cs typeface="D2Coding"/>
               </a:rPr>
               <a:t>WHERE  price &gt; (SELECT AVG(price) FROM products);</a:t>
             </a:r>
@@ -9243,9 +9243,9 @@
                 <a:solidFill>
                   <a:srgbClr val="E6EAF2"/>
                 </a:solidFill>
-                <a:latin typeface="나눔고딕코딩"/>
-                <a:ea typeface="나눔고딕코딩"/>
-                <a:cs typeface="나눔고딕코딩"/>
+                <a:latin typeface="D2Coding"/>
+                <a:ea typeface="D2Coding"/>
+                <a:cs typeface="D2Coding"/>
               </a:rPr>
               <a:t/>
             </a:r>
@@ -9261,9 +9261,9 @@
                 <a:solidFill>
                   <a:srgbClr val="E6EAF2"/>
                 </a:solidFill>
-                <a:latin typeface="나눔고딕코딩"/>
-                <a:ea typeface="나눔고딕코딩"/>
-                <a:cs typeface="나눔고딕코딩"/>
+                <a:latin typeface="D2Coding"/>
+                <a:ea typeface="D2Coding"/>
+                <a:cs typeface="D2Coding"/>
               </a:rPr>
               <a:t>SELECT name FROM customers</a:t>
             </a:r>
@@ -9279,9 +9279,9 @@
                 <a:solidFill>
                   <a:srgbClr val="E6EAF2"/>
                 </a:solidFill>
-                <a:latin typeface="나눔고딕코딩"/>
-                <a:ea typeface="나눔고딕코딩"/>
-                <a:cs typeface="나눔고딕코딩"/>
+                <a:latin typeface="D2Coding"/>
+                <a:ea typeface="D2Coding"/>
+                <a:cs typeface="D2Coding"/>
               </a:rPr>
               <a:t>WHERE  cust_id IN (SELECT cust_id FROM orders);</a:t>
             </a:r>
@@ -9297,9 +9297,9 @@
                 <a:solidFill>
                   <a:srgbClr val="E6EAF2"/>
                 </a:solidFill>
-                <a:latin typeface="나눔고딕코딩"/>
-                <a:ea typeface="나눔고딕코딩"/>
-                <a:cs typeface="나눔고딕코딩"/>
+                <a:latin typeface="D2Coding"/>
+                <a:ea typeface="D2Coding"/>
+                <a:cs typeface="D2Coding"/>
               </a:rPr>
               <a:t/>
             </a:r>
@@ -9315,9 +9315,9 @@
                 <a:solidFill>
                   <a:srgbClr val="E6EAF2"/>
                 </a:solidFill>
-                <a:latin typeface="나눔고딕코딩"/>
-                <a:ea typeface="나눔고딕코딩"/>
-                <a:cs typeface="나눔고딕코딩"/>
+                <a:latin typeface="D2Coding"/>
+                <a:ea typeface="D2Coding"/>
+                <a:cs typeface="D2Coding"/>
               </a:rPr>
               <a:t>SELECT name FROM customers c</a:t>
             </a:r>
@@ -9333,9 +9333,9 @@
                 <a:solidFill>
                   <a:srgbClr val="E6EAF2"/>
                 </a:solidFill>
-                <a:latin typeface="나눔고딕코딩"/>
-                <a:ea typeface="나눔고딕코딩"/>
-                <a:cs typeface="나눔고딕코딩"/>
+                <a:latin typeface="D2Coding"/>
+                <a:ea typeface="D2Coding"/>
+                <a:cs typeface="D2Coding"/>
               </a:rPr>
               <a:t>WHERE  EXISTS (SELECT 1 FROM orders o WHERE o.cust_id = c.cust_id);</a:t>
             </a:r>
@@ -9351,9 +9351,9 @@
                 <a:solidFill>
                   <a:srgbClr val="E6EAF2"/>
                 </a:solidFill>
-                <a:latin typeface="나눔고딕코딩"/>
-                <a:ea typeface="나눔고딕코딩"/>
-                <a:cs typeface="나눔고딕코딩"/>
+                <a:latin typeface="D2Coding"/>
+                <a:ea typeface="D2Coding"/>
+                <a:cs typeface="D2Coding"/>
               </a:rPr>
               <a:t/>
             </a:r>
@@ -9369,9 +9369,9 @@
                 <a:solidFill>
                   <a:srgbClr val="E6EAF2"/>
                 </a:solidFill>
-                <a:latin typeface="나눔고딕코딩"/>
-                <a:ea typeface="나눔고딕코딩"/>
-                <a:cs typeface="나눔고딕코딩"/>
+                <a:latin typeface="D2Coding"/>
+                <a:ea typeface="D2Coding"/>
+                <a:cs typeface="D2Coding"/>
               </a:rPr>
               <a:t>SELECT name FROM customers WHERE grade = 'VIP'</a:t>
             </a:r>
@@ -9387,9 +9387,9 @@
                 <a:solidFill>
                   <a:srgbClr val="E6EAF2"/>
                 </a:solidFill>
-                <a:latin typeface="나눔고딕코딩"/>
-                <a:ea typeface="나눔고딕코딩"/>
-                <a:cs typeface="나눔고딕코딩"/>
+                <a:latin typeface="D2Coding"/>
+                <a:ea typeface="D2Coding"/>
+                <a:cs typeface="D2Coding"/>
               </a:rPr>
               <a:t>UNION</a:t>
             </a:r>
@@ -9405,9 +9405,9 @@
                 <a:solidFill>
                   <a:srgbClr val="E6EAF2"/>
                 </a:solidFill>
-                <a:latin typeface="나눔고딕코딩"/>
-                <a:ea typeface="나눔고딕코딩"/>
-                <a:cs typeface="나눔고딕코딩"/>
+                <a:latin typeface="D2Coding"/>
+                <a:ea typeface="D2Coding"/>
+                <a:cs typeface="D2Coding"/>
               </a:rPr>
               <a:t>SELECT name FROM customers WHERE city = '서울';</a:t>
             </a:r>
@@ -11655,9 +11655,9 @@
                 <a:solidFill>
                   <a:srgbClr val="7A869C"/>
                 </a:solidFill>
-                <a:latin typeface="나눔고딕코딩"/>
-                <a:ea typeface="나눔고딕코딩"/>
-                <a:cs typeface="나눔고딕코딩"/>
+                <a:latin typeface="D2Coding"/>
+                <a:ea typeface="D2Coding"/>
+                <a:cs typeface="D2Coding"/>
               </a:rPr>
               <a:t>1</a:t>
             </a:r>
@@ -11673,9 +11673,9 @@
                 <a:solidFill>
                   <a:srgbClr val="7A869C"/>
                 </a:solidFill>
-                <a:latin typeface="나눔고딕코딩"/>
-                <a:ea typeface="나눔고딕코딩"/>
-                <a:cs typeface="나눔고딕코딩"/>
+                <a:latin typeface="D2Coding"/>
+                <a:ea typeface="D2Coding"/>
+                <a:cs typeface="D2Coding"/>
               </a:rPr>
               <a:t>2</a:t>
             </a:r>
@@ -11691,9 +11691,9 @@
                 <a:solidFill>
                   <a:srgbClr val="7A869C"/>
                 </a:solidFill>
-                <a:latin typeface="나눔고딕코딩"/>
-                <a:ea typeface="나눔고딕코딩"/>
-                <a:cs typeface="나눔고딕코딩"/>
+                <a:latin typeface="D2Coding"/>
+                <a:ea typeface="D2Coding"/>
+                <a:cs typeface="D2Coding"/>
               </a:rPr>
               <a:t>3</a:t>
             </a:r>
@@ -11709,9 +11709,9 @@
                 <a:solidFill>
                   <a:srgbClr val="7A869C"/>
                 </a:solidFill>
-                <a:latin typeface="나눔고딕코딩"/>
-                <a:ea typeface="나눔고딕코딩"/>
-                <a:cs typeface="나눔고딕코딩"/>
+                <a:latin typeface="D2Coding"/>
+                <a:ea typeface="D2Coding"/>
+                <a:cs typeface="D2Coding"/>
               </a:rPr>
               <a:t>4</a:t>
             </a:r>
@@ -11727,9 +11727,9 @@
                 <a:solidFill>
                   <a:srgbClr val="7A869C"/>
                 </a:solidFill>
-                <a:latin typeface="나눔고딕코딩"/>
-                <a:ea typeface="나눔고딕코딩"/>
-                <a:cs typeface="나눔고딕코딩"/>
+                <a:latin typeface="D2Coding"/>
+                <a:ea typeface="D2Coding"/>
+                <a:cs typeface="D2Coding"/>
               </a:rPr>
               <a:t>5</a:t>
             </a:r>
@@ -11745,9 +11745,9 @@
                 <a:solidFill>
                   <a:srgbClr val="7A869C"/>
                 </a:solidFill>
-                <a:latin typeface="나눔고딕코딩"/>
-                <a:ea typeface="나눔고딕코딩"/>
-                <a:cs typeface="나눔고딕코딩"/>
+                <a:latin typeface="D2Coding"/>
+                <a:ea typeface="D2Coding"/>
+                <a:cs typeface="D2Coding"/>
               </a:rPr>
               <a:t>6</a:t>
             </a:r>
@@ -11763,9 +11763,9 @@
                 <a:solidFill>
                   <a:srgbClr val="7A869C"/>
                 </a:solidFill>
-                <a:latin typeface="나눔고딕코딩"/>
-                <a:ea typeface="나눔고딕코딩"/>
-                <a:cs typeface="나눔고딕코딩"/>
+                <a:latin typeface="D2Coding"/>
+                <a:ea typeface="D2Coding"/>
+                <a:cs typeface="D2Coding"/>
               </a:rPr>
               <a:t>7</a:t>
             </a:r>
@@ -11781,9 +11781,9 @@
                 <a:solidFill>
                   <a:srgbClr val="7A869C"/>
                 </a:solidFill>
-                <a:latin typeface="나눔고딕코딩"/>
-                <a:ea typeface="나눔고딕코딩"/>
-                <a:cs typeface="나눔고딕코딩"/>
+                <a:latin typeface="D2Coding"/>
+                <a:ea typeface="D2Coding"/>
+                <a:cs typeface="D2Coding"/>
               </a:rPr>
               <a:t>8</a:t>
             </a:r>
@@ -11799,9 +11799,9 @@
                 <a:solidFill>
                   <a:srgbClr val="7A869C"/>
                 </a:solidFill>
-                <a:latin typeface="나눔고딕코딩"/>
-                <a:ea typeface="나눔고딕코딩"/>
-                <a:cs typeface="나눔고딕코딩"/>
+                <a:latin typeface="D2Coding"/>
+                <a:ea typeface="D2Coding"/>
+                <a:cs typeface="D2Coding"/>
               </a:rPr>
               <a:t>9</a:t>
             </a:r>
@@ -11817,9 +11817,9 @@
                 <a:solidFill>
                   <a:srgbClr val="7A869C"/>
                 </a:solidFill>
-                <a:latin typeface="나눔고딕코딩"/>
-                <a:ea typeface="나눔고딕코딩"/>
-                <a:cs typeface="나눔고딕코딩"/>
+                <a:latin typeface="D2Coding"/>
+                <a:ea typeface="D2Coding"/>
+                <a:cs typeface="D2Coding"/>
               </a:rPr>
               <a:t>10</a:t>
             </a:r>
@@ -11858,9 +11858,9 @@
                 <a:solidFill>
                   <a:srgbClr val="E6EAF2"/>
                 </a:solidFill>
-                <a:latin typeface="나눔고딕코딩"/>
-                <a:ea typeface="나눔고딕코딩"/>
-                <a:cs typeface="나눔고딕코딩"/>
+                <a:latin typeface="D2Coding"/>
+                <a:ea typeface="D2Coding"/>
+                <a:cs typeface="D2Coding"/>
               </a:rPr>
               <a:t>CREATE VIEW v_sales AS</a:t>
             </a:r>
@@ -11876,9 +11876,9 @@
                 <a:solidFill>
                   <a:srgbClr val="E6EAF2"/>
                 </a:solidFill>
-                <a:latin typeface="나눔고딕코딩"/>
-                <a:ea typeface="나눔고딕코딩"/>
-                <a:cs typeface="나눔고딕코딩"/>
+                <a:latin typeface="D2Coding"/>
+                <a:ea typeface="D2Coding"/>
+                <a:cs typeface="D2Coding"/>
               </a:rPr>
               <a:t>SELECT o.order_id, o.order_date, i.prod_id, i.qty * i.unit_price AS 금액</a:t>
             </a:r>
@@ -11894,9 +11894,9 @@
                 <a:solidFill>
                   <a:srgbClr val="E6EAF2"/>
                 </a:solidFill>
-                <a:latin typeface="나눔고딕코딩"/>
-                <a:ea typeface="나눔고딕코딩"/>
-                <a:cs typeface="나눔고딕코딩"/>
+                <a:latin typeface="D2Coding"/>
+                <a:ea typeface="D2Coding"/>
+                <a:cs typeface="D2Coding"/>
               </a:rPr>
               <a:t>FROM   orders o</a:t>
             </a:r>
@@ -11912,9 +11912,9 @@
                 <a:solidFill>
                   <a:srgbClr val="E6EAF2"/>
                 </a:solidFill>
-                <a:latin typeface="나눔고딕코딩"/>
-                <a:ea typeface="나눔고딕코딩"/>
-                <a:cs typeface="나눔고딕코딩"/>
+                <a:latin typeface="D2Coding"/>
+                <a:ea typeface="D2Coding"/>
+                <a:cs typeface="D2Coding"/>
               </a:rPr>
               <a:t>JOIN   order_items i ON o.order_id = i.order_id</a:t>
             </a:r>
@@ -11930,9 +11930,9 @@
                 <a:solidFill>
                   <a:srgbClr val="E6EAF2"/>
                 </a:solidFill>
-                <a:latin typeface="나눔고딕코딩"/>
-                <a:ea typeface="나눔고딕코딩"/>
-                <a:cs typeface="나눔고딕코딩"/>
+                <a:latin typeface="D2Coding"/>
+                <a:ea typeface="D2Coding"/>
+                <a:cs typeface="D2Coding"/>
               </a:rPr>
               <a:t>WHERE  o.status &lt;&gt; '취소';</a:t>
             </a:r>
@@ -11948,9 +11948,9 @@
                 <a:solidFill>
                   <a:srgbClr val="E6EAF2"/>
                 </a:solidFill>
-                <a:latin typeface="나눔고딕코딩"/>
-                <a:ea typeface="나눔고딕코딩"/>
-                <a:cs typeface="나눔고딕코딩"/>
+                <a:latin typeface="D2Coding"/>
+                <a:ea typeface="D2Coding"/>
+                <a:cs typeface="D2Coding"/>
               </a:rPr>
               <a:t/>
             </a:r>
@@ -11966,9 +11966,9 @@
                 <a:solidFill>
                   <a:srgbClr val="E6EAF2"/>
                 </a:solidFill>
-                <a:latin typeface="나눔고딕코딩"/>
-                <a:ea typeface="나눔고딕코딩"/>
-                <a:cs typeface="나눔고딕코딩"/>
+                <a:latin typeface="D2Coding"/>
+                <a:ea typeface="D2Coding"/>
+                <a:cs typeface="D2Coding"/>
               </a:rPr>
               <a:t>CREATE INDEX idx_orders_date ON orders (order_date);</a:t>
             </a:r>
@@ -11984,9 +11984,9 @@
                 <a:solidFill>
                   <a:srgbClr val="E6EAF2"/>
                 </a:solidFill>
-                <a:latin typeface="나눔고딕코딩"/>
-                <a:ea typeface="나눔고딕코딩"/>
-                <a:cs typeface="나눔고딕코딩"/>
+                <a:latin typeface="D2Coding"/>
+                <a:ea typeface="D2Coding"/>
+                <a:cs typeface="D2Coding"/>
               </a:rPr>
               <a:t/>
             </a:r>
@@ -12002,9 +12002,9 @@
                 <a:solidFill>
                   <a:srgbClr val="E6EAF2"/>
                 </a:solidFill>
-                <a:latin typeface="나눔고딕코딩"/>
-                <a:ea typeface="나눔고딕코딩"/>
-                <a:cs typeface="나눔고딕코딩"/>
+                <a:latin typeface="D2Coding"/>
+                <a:ea typeface="D2Coding"/>
+                <a:cs typeface="D2Coding"/>
               </a:rPr>
               <a:t>GRANT  SELECT ON daon.* TO 'intern'@'localhost';</a:t>
             </a:r>
@@ -12020,9 +12020,9 @@
                 <a:solidFill>
                   <a:srgbClr val="E6EAF2"/>
                 </a:solidFill>
-                <a:latin typeface="나눔고딕코딩"/>
-                <a:ea typeface="나눔고딕코딩"/>
-                <a:cs typeface="나눔고딕코딩"/>
+                <a:latin typeface="D2Coding"/>
+                <a:ea typeface="D2Coding"/>
+                <a:cs typeface="D2Coding"/>
               </a:rPr>
               <a:t>REVOKE SELECT ON daon.* FROM 'intern'@'localhost';</a:t>
             </a:r>
@@ -13988,9 +13988,9 @@
                 <a:solidFill>
                   <a:srgbClr val="E6EAF2"/>
                 </a:solidFill>
-                <a:latin typeface="나눔고딕코딩"/>
-                <a:ea typeface="나눔고딕코딩"/>
-                <a:cs typeface="나눔고딕코딩"/>
+                <a:latin typeface="D2Coding"/>
+                <a:ea typeface="D2Coding"/>
+                <a:cs typeface="D2Coding"/>
               </a:rPr>
               <a:t>CONCAT()</a:t>
             </a:r>
@@ -14207,9 +14207,9 @@
                 <a:solidFill>
                   <a:srgbClr val="E6EAF2"/>
                 </a:solidFill>
-                <a:latin typeface="나눔고딕코딩"/>
-                <a:ea typeface="나눔고딕코딩"/>
-                <a:cs typeface="나눔고딕코딩"/>
+                <a:latin typeface="D2Coding"/>
+                <a:ea typeface="D2Coding"/>
+                <a:cs typeface="D2Coding"/>
               </a:rPr>
               <a:t>IFNULL()</a:t>
             </a:r>
@@ -14426,9 +14426,9 @@
                 <a:solidFill>
                   <a:srgbClr val="E6EAF2"/>
                 </a:solidFill>
-                <a:latin typeface="나눔고딕코딩"/>
-                <a:ea typeface="나눔고딕코딩"/>
-                <a:cs typeface="나눔고딕코딩"/>
+                <a:latin typeface="D2Coding"/>
+                <a:ea typeface="D2Coding"/>
+                <a:cs typeface="D2Coding"/>
               </a:rPr>
               <a:t>AUTO_INCREMENT</a:t>
             </a:r>
@@ -14604,9 +14604,9 @@
                 <a:solidFill>
                   <a:srgbClr val="E6EAF2"/>
                 </a:solidFill>
-                <a:latin typeface="나눔고딕코딩"/>
-                <a:ea typeface="나눔고딕코딩"/>
-                <a:cs typeface="나눔고딕코딩"/>
+                <a:latin typeface="D2Coding"/>
+                <a:ea typeface="D2Coding"/>
+                <a:cs typeface="D2Coding"/>
               </a:rPr>
               <a:t>LIMIT</a:t>
             </a:r>
@@ -21472,9 +21472,9 @@
                 <a:solidFill>
                   <a:srgbClr val="7A869C"/>
                 </a:solidFill>
-                <a:latin typeface="나눔고딕코딩"/>
-                <a:ea typeface="나눔고딕코딩"/>
-                <a:cs typeface="나눔고딕코딩"/>
+                <a:latin typeface="D2Coding"/>
+                <a:ea typeface="D2Coding"/>
+                <a:cs typeface="D2Coding"/>
               </a:rPr>
               <a:t>1</a:t>
             </a:r>
@@ -21490,9 +21490,9 @@
                 <a:solidFill>
                   <a:srgbClr val="7A869C"/>
                 </a:solidFill>
-                <a:latin typeface="나눔고딕코딩"/>
-                <a:ea typeface="나눔고딕코딩"/>
-                <a:cs typeface="나눔고딕코딩"/>
+                <a:latin typeface="D2Coding"/>
+                <a:ea typeface="D2Coding"/>
+                <a:cs typeface="D2Coding"/>
               </a:rPr>
               <a:t>2</a:t>
             </a:r>
@@ -21508,9 +21508,9 @@
                 <a:solidFill>
                   <a:srgbClr val="7A869C"/>
                 </a:solidFill>
-                <a:latin typeface="나눔고딕코딩"/>
-                <a:ea typeface="나눔고딕코딩"/>
-                <a:cs typeface="나눔고딕코딩"/>
+                <a:latin typeface="D2Coding"/>
+                <a:ea typeface="D2Coding"/>
+                <a:cs typeface="D2Coding"/>
               </a:rPr>
               <a:t>3</a:t>
             </a:r>
@@ -21526,9 +21526,9 @@
                 <a:solidFill>
                   <a:srgbClr val="7A869C"/>
                 </a:solidFill>
-                <a:latin typeface="나눔고딕코딩"/>
-                <a:ea typeface="나눔고딕코딩"/>
-                <a:cs typeface="나눔고딕코딩"/>
+                <a:latin typeface="D2Coding"/>
+                <a:ea typeface="D2Coding"/>
+                <a:cs typeface="D2Coding"/>
               </a:rPr>
               <a:t>4</a:t>
             </a:r>
@@ -21544,9 +21544,9 @@
                 <a:solidFill>
                   <a:srgbClr val="7A869C"/>
                 </a:solidFill>
-                <a:latin typeface="나눔고딕코딩"/>
-                <a:ea typeface="나눔고딕코딩"/>
-                <a:cs typeface="나눔고딕코딩"/>
+                <a:latin typeface="D2Coding"/>
+                <a:ea typeface="D2Coding"/>
+                <a:cs typeface="D2Coding"/>
               </a:rPr>
               <a:t>5</a:t>
             </a:r>
@@ -21562,9 +21562,9 @@
                 <a:solidFill>
                   <a:srgbClr val="7A869C"/>
                 </a:solidFill>
-                <a:latin typeface="나눔고딕코딩"/>
-                <a:ea typeface="나눔고딕코딩"/>
-                <a:cs typeface="나눔고딕코딩"/>
+                <a:latin typeface="D2Coding"/>
+                <a:ea typeface="D2Coding"/>
+                <a:cs typeface="D2Coding"/>
               </a:rPr>
               <a:t>6</a:t>
             </a:r>
@@ -21603,9 +21603,9 @@
                 <a:solidFill>
                   <a:srgbClr val="E6EAF2"/>
                 </a:solidFill>
-                <a:latin typeface="나눔고딕코딩"/>
-                <a:ea typeface="나눔고딕코딩"/>
-                <a:cs typeface="나눔고딕코딩"/>
+                <a:latin typeface="D2Coding"/>
+                <a:ea typeface="D2Coding"/>
+                <a:cs typeface="D2Coding"/>
               </a:rPr>
               <a:t>SELECT name FROM employees WHERE salary &gt;= 300;</a:t>
             </a:r>
@@ -21621,9 +21621,9 @@
                 <a:solidFill>
                   <a:srgbClr val="E6EAF2"/>
                 </a:solidFill>
-                <a:latin typeface="나눔고딕코딩"/>
-                <a:ea typeface="나눔고딕코딩"/>
-                <a:cs typeface="나눔고딕코딩"/>
+                <a:latin typeface="D2Coding"/>
+                <a:ea typeface="D2Coding"/>
+                <a:cs typeface="D2Coding"/>
               </a:rPr>
               <a:t>SELECT name FROM employees WHERE salary &lt;  300;</a:t>
             </a:r>
@@ -21639,9 +21639,9 @@
                 <a:solidFill>
                   <a:srgbClr val="E6EAF2"/>
                 </a:solidFill>
-                <a:latin typeface="나눔고딕코딩"/>
-                <a:ea typeface="나눔고딕코딩"/>
-                <a:cs typeface="나눔고딕코딩"/>
+                <a:latin typeface="D2Coding"/>
+                <a:ea typeface="D2Coding"/>
+                <a:cs typeface="D2Coding"/>
               </a:rPr>
               <a:t>SELECT name FROM employees WHERE salary IS NULL;</a:t>
             </a:r>
@@ -21657,9 +21657,9 @@
                 <a:solidFill>
                   <a:srgbClr val="E6EAF2"/>
                 </a:solidFill>
-                <a:latin typeface="나눔고딕코딩"/>
-                <a:ea typeface="나눔고딕코딩"/>
-                <a:cs typeface="나눔고딕코딩"/>
+                <a:latin typeface="D2Coding"/>
+                <a:ea typeface="D2Coding"/>
+                <a:cs typeface="D2Coding"/>
               </a:rPr>
               <a:t/>
             </a:r>
@@ -21675,9 +21675,9 @@
                 <a:solidFill>
                   <a:srgbClr val="E6EAF2"/>
                 </a:solidFill>
-                <a:latin typeface="나눔고딕코딩"/>
-                <a:ea typeface="나눔고딕코딩"/>
-                <a:cs typeface="나눔고딕코딩"/>
+                <a:latin typeface="D2Coding"/>
+                <a:ea typeface="D2Coding"/>
+                <a:cs typeface="D2Coding"/>
               </a:rPr>
               <a:t>SELECT dept, name, COUNT(*) FROM employees GROUP BY dept;</a:t>
             </a:r>
@@ -21693,9 +21693,9 @@
                 <a:solidFill>
                   <a:srgbClr val="E6EAF2"/>
                 </a:solidFill>
-                <a:latin typeface="나눔고딕코딩"/>
-                <a:ea typeface="나눔고딕코딩"/>
-                <a:cs typeface="나눔고딕코딩"/>
+                <a:latin typeface="D2Coding"/>
+                <a:ea typeface="D2Coding"/>
+                <a:cs typeface="D2Coding"/>
               </a:rPr>
               <a:t>SELECT dept, COUNT(*) AS 인원 FROM employees GROUP BY dept;</a:t>
             </a:r>
@@ -23763,9 +23763,9 @@
                 <a:solidFill>
                   <a:srgbClr val="7A869C"/>
                 </a:solidFill>
-                <a:latin typeface="나눔고딕코딩"/>
-                <a:ea typeface="나눔고딕코딩"/>
-                <a:cs typeface="나눔고딕코딩"/>
+                <a:latin typeface="D2Coding"/>
+                <a:ea typeface="D2Coding"/>
+                <a:cs typeface="D2Coding"/>
               </a:rPr>
               <a:t>1</a:t>
             </a:r>
@@ -23781,9 +23781,9 @@
                 <a:solidFill>
                   <a:srgbClr val="7A869C"/>
                 </a:solidFill>
-                <a:latin typeface="나눔고딕코딩"/>
-                <a:ea typeface="나눔고딕코딩"/>
-                <a:cs typeface="나눔고딕코딩"/>
+                <a:latin typeface="D2Coding"/>
+                <a:ea typeface="D2Coding"/>
+                <a:cs typeface="D2Coding"/>
               </a:rPr>
               <a:t>2</a:t>
             </a:r>
@@ -23799,9 +23799,9 @@
                 <a:solidFill>
                   <a:srgbClr val="7A869C"/>
                 </a:solidFill>
-                <a:latin typeface="나눔고딕코딩"/>
-                <a:ea typeface="나눔고딕코딩"/>
-                <a:cs typeface="나눔고딕코딩"/>
+                <a:latin typeface="D2Coding"/>
+                <a:ea typeface="D2Coding"/>
+                <a:cs typeface="D2Coding"/>
               </a:rPr>
               <a:t>3</a:t>
             </a:r>
@@ -23817,9 +23817,9 @@
                 <a:solidFill>
                   <a:srgbClr val="7A869C"/>
                 </a:solidFill>
-                <a:latin typeface="나눔고딕코딩"/>
-                <a:ea typeface="나눔고딕코딩"/>
-                <a:cs typeface="나눔고딕코딩"/>
+                <a:latin typeface="D2Coding"/>
+                <a:ea typeface="D2Coding"/>
+                <a:cs typeface="D2Coding"/>
               </a:rPr>
               <a:t>4</a:t>
             </a:r>
@@ -23835,9 +23835,9 @@
                 <a:solidFill>
                   <a:srgbClr val="7A869C"/>
                 </a:solidFill>
-                <a:latin typeface="나눔고딕코딩"/>
-                <a:ea typeface="나눔고딕코딩"/>
-                <a:cs typeface="나눔고딕코딩"/>
+                <a:latin typeface="D2Coding"/>
+                <a:ea typeface="D2Coding"/>
+                <a:cs typeface="D2Coding"/>
               </a:rPr>
               <a:t>5</a:t>
             </a:r>
@@ -23853,9 +23853,9 @@
                 <a:solidFill>
                   <a:srgbClr val="7A869C"/>
                 </a:solidFill>
-                <a:latin typeface="나눔고딕코딩"/>
-                <a:ea typeface="나눔고딕코딩"/>
-                <a:cs typeface="나눔고딕코딩"/>
+                <a:latin typeface="D2Coding"/>
+                <a:ea typeface="D2Coding"/>
+                <a:cs typeface="D2Coding"/>
               </a:rPr>
               <a:t>6</a:t>
             </a:r>
@@ -23871,9 +23871,9 @@
                 <a:solidFill>
                   <a:srgbClr val="7A869C"/>
                 </a:solidFill>
-                <a:latin typeface="나눔고딕코딩"/>
-                <a:ea typeface="나눔고딕코딩"/>
-                <a:cs typeface="나눔고딕코딩"/>
+                <a:latin typeface="D2Coding"/>
+                <a:ea typeface="D2Coding"/>
+                <a:cs typeface="D2Coding"/>
               </a:rPr>
               <a:t>7</a:t>
             </a:r>
@@ -23889,9 +23889,9 @@
                 <a:solidFill>
                   <a:srgbClr val="7A869C"/>
                 </a:solidFill>
-                <a:latin typeface="나눔고딕코딩"/>
-                <a:ea typeface="나눔고딕코딩"/>
-                <a:cs typeface="나눔고딕코딩"/>
+                <a:latin typeface="D2Coding"/>
+                <a:ea typeface="D2Coding"/>
+                <a:cs typeface="D2Coding"/>
               </a:rPr>
               <a:t>8</a:t>
             </a:r>
@@ -23930,9 +23930,9 @@
                 <a:solidFill>
                   <a:srgbClr val="E6EAF2"/>
                 </a:solidFill>
-                <a:latin typeface="나눔고딕코딩"/>
-                <a:ea typeface="나눔고딕코딩"/>
-                <a:cs typeface="나눔고딕코딩"/>
+                <a:latin typeface="D2Coding"/>
+                <a:ea typeface="D2Coding"/>
+                <a:cs typeface="D2Coding"/>
               </a:rPr>
               <a:t>SELECT COUNT(*) FROM orders o, customers c;                     -- (X) 150</a:t>
             </a:r>
@@ -23948,9 +23948,9 @@
                 <a:solidFill>
                   <a:srgbClr val="E6EAF2"/>
                 </a:solidFill>
-                <a:latin typeface="나눔고딕코딩"/>
-                <a:ea typeface="나눔고딕코딩"/>
-                <a:cs typeface="나눔고딕코딩"/>
+                <a:latin typeface="D2Coding"/>
+                <a:ea typeface="D2Coding"/>
+                <a:cs typeface="D2Coding"/>
               </a:rPr>
               <a:t>SELECT COUNT(*) FROM orders o</a:t>
             </a:r>
@@ -23966,9 +23966,9 @@
                 <a:solidFill>
                   <a:srgbClr val="E6EAF2"/>
                 </a:solidFill>
-                <a:latin typeface="나눔고딕코딩"/>
-                <a:ea typeface="나눔고딕코딩"/>
-                <a:cs typeface="나눔고딕코딩"/>
+                <a:latin typeface="D2Coding"/>
+                <a:ea typeface="D2Coding"/>
+                <a:cs typeface="D2Coding"/>
               </a:rPr>
               <a:t>JOIN   customers c ON o.cust_id = c.cust_id;                    -- (O) 15</a:t>
             </a:r>
@@ -23984,9 +23984,9 @@
                 <a:solidFill>
                   <a:srgbClr val="E6EAF2"/>
                 </a:solidFill>
-                <a:latin typeface="나눔고딕코딩"/>
-                <a:ea typeface="나눔고딕코딩"/>
-                <a:cs typeface="나눔고딕코딩"/>
+                <a:latin typeface="D2Coding"/>
+                <a:ea typeface="D2Coding"/>
+                <a:cs typeface="D2Coding"/>
               </a:rPr>
               <a:t/>
             </a:r>
@@ -24002,9 +24002,9 @@
                 <a:solidFill>
                   <a:srgbClr val="E6EAF2"/>
                 </a:solidFill>
-                <a:latin typeface="나눔고딕코딩"/>
-                <a:ea typeface="나눔고딕코딩"/>
-                <a:cs typeface="나눔고딕코딩"/>
+                <a:latin typeface="D2Coding"/>
+                <a:ea typeface="D2Coding"/>
+                <a:cs typeface="D2Coding"/>
               </a:rPr>
               <a:t>SELECT e.name, COUNT(o.order_id) AS 건수</a:t>
             </a:r>
@@ -24020,9 +24020,9 @@
                 <a:solidFill>
                   <a:srgbClr val="E6EAF2"/>
                 </a:solidFill>
-                <a:latin typeface="나눔고딕코딩"/>
-                <a:ea typeface="나눔고딕코딩"/>
-                <a:cs typeface="나눔고딕코딩"/>
+                <a:latin typeface="D2Coding"/>
+                <a:ea typeface="D2Coding"/>
+                <a:cs typeface="D2Coding"/>
               </a:rPr>
               <a:t>FROM   employees e</a:t>
             </a:r>
@@ -24038,9 +24038,9 @@
                 <a:solidFill>
                   <a:srgbClr val="E6EAF2"/>
                 </a:solidFill>
-                <a:latin typeface="나눔고딕코딩"/>
-                <a:ea typeface="나눔고딕코딩"/>
-                <a:cs typeface="나눔고딕코딩"/>
+                <a:latin typeface="D2Coding"/>
+                <a:ea typeface="D2Coding"/>
+                <a:cs typeface="D2Coding"/>
               </a:rPr>
               <a:t>LEFT   JOIN orders o ON e.emp_id = o.emp_id AND o.status &lt;&gt; '취소'</a:t>
             </a:r>
@@ -24056,9 +24056,9 @@
                 <a:solidFill>
                   <a:srgbClr val="E6EAF2"/>
                 </a:solidFill>
-                <a:latin typeface="나눔고딕코딩"/>
-                <a:ea typeface="나눔고딕코딩"/>
-                <a:cs typeface="나눔고딕코딩"/>
+                <a:latin typeface="D2Coding"/>
+                <a:ea typeface="D2Coding"/>
+                <a:cs typeface="D2Coding"/>
               </a:rPr>
               <a:t>GROUP  BY e.emp_id, e.name;</a:t>
             </a:r>
@@ -47623,9 +47623,9 @@
                 <a:solidFill>
                   <a:srgbClr val="7A869C"/>
                 </a:solidFill>
-                <a:latin typeface="나눔고딕코딩"/>
-                <a:ea typeface="나눔고딕코딩"/>
-                <a:cs typeface="나눔고딕코딩"/>
+                <a:latin typeface="D2Coding"/>
+                <a:ea typeface="D2Coding"/>
+                <a:cs typeface="D2Coding"/>
               </a:rPr>
               <a:t>1</a:t>
             </a:r>
@@ -47641,9 +47641,9 @@
                 <a:solidFill>
                   <a:srgbClr val="7A869C"/>
                 </a:solidFill>
-                <a:latin typeface="나눔고딕코딩"/>
-                <a:ea typeface="나눔고딕코딩"/>
-                <a:cs typeface="나눔고딕코딩"/>
+                <a:latin typeface="D2Coding"/>
+                <a:ea typeface="D2Coding"/>
+                <a:cs typeface="D2Coding"/>
               </a:rPr>
               <a:t>2</a:t>
             </a:r>
@@ -47659,9 +47659,9 @@
                 <a:solidFill>
                   <a:srgbClr val="7A869C"/>
                 </a:solidFill>
-                <a:latin typeface="나눔고딕코딩"/>
-                <a:ea typeface="나눔고딕코딩"/>
-                <a:cs typeface="나눔고딕코딩"/>
+                <a:latin typeface="D2Coding"/>
+                <a:ea typeface="D2Coding"/>
+                <a:cs typeface="D2Coding"/>
               </a:rPr>
               <a:t>3</a:t>
             </a:r>
@@ -47677,9 +47677,9 @@
                 <a:solidFill>
                   <a:srgbClr val="7A869C"/>
                 </a:solidFill>
-                <a:latin typeface="나눔고딕코딩"/>
-                <a:ea typeface="나눔고딕코딩"/>
-                <a:cs typeface="나눔고딕코딩"/>
+                <a:latin typeface="D2Coding"/>
+                <a:ea typeface="D2Coding"/>
+                <a:cs typeface="D2Coding"/>
               </a:rPr>
               <a:t>4</a:t>
             </a:r>
@@ -47695,9 +47695,9 @@
                 <a:solidFill>
                   <a:srgbClr val="7A869C"/>
                 </a:solidFill>
-                <a:latin typeface="나눔고딕코딩"/>
-                <a:ea typeface="나눔고딕코딩"/>
-                <a:cs typeface="나눔고딕코딩"/>
+                <a:latin typeface="D2Coding"/>
+                <a:ea typeface="D2Coding"/>
+                <a:cs typeface="D2Coding"/>
               </a:rPr>
               <a:t>5</a:t>
             </a:r>
@@ -47713,9 +47713,9 @@
                 <a:solidFill>
                   <a:srgbClr val="7A869C"/>
                 </a:solidFill>
-                <a:latin typeface="나눔고딕코딩"/>
-                <a:ea typeface="나눔고딕코딩"/>
-                <a:cs typeface="나눔고딕코딩"/>
+                <a:latin typeface="D2Coding"/>
+                <a:ea typeface="D2Coding"/>
+                <a:cs typeface="D2Coding"/>
               </a:rPr>
               <a:t>6</a:t>
             </a:r>
@@ -47731,9 +47731,9 @@
                 <a:solidFill>
                   <a:srgbClr val="7A869C"/>
                 </a:solidFill>
-                <a:latin typeface="나눔고딕코딩"/>
-                <a:ea typeface="나눔고딕코딩"/>
-                <a:cs typeface="나눔고딕코딩"/>
+                <a:latin typeface="D2Coding"/>
+                <a:ea typeface="D2Coding"/>
+                <a:cs typeface="D2Coding"/>
               </a:rPr>
               <a:t>7</a:t>
             </a:r>
@@ -47749,9 +47749,9 @@
                 <a:solidFill>
                   <a:srgbClr val="7A869C"/>
                 </a:solidFill>
-                <a:latin typeface="나눔고딕코딩"/>
-                <a:ea typeface="나눔고딕코딩"/>
-                <a:cs typeface="나눔고딕코딩"/>
+                <a:latin typeface="D2Coding"/>
+                <a:ea typeface="D2Coding"/>
+                <a:cs typeface="D2Coding"/>
               </a:rPr>
               <a:t>8</a:t>
             </a:r>
@@ -47767,9 +47767,9 @@
                 <a:solidFill>
                   <a:srgbClr val="7A869C"/>
                 </a:solidFill>
-                <a:latin typeface="나눔고딕코딩"/>
-                <a:ea typeface="나눔고딕코딩"/>
-                <a:cs typeface="나눔고딕코딩"/>
+                <a:latin typeface="D2Coding"/>
+                <a:ea typeface="D2Coding"/>
+                <a:cs typeface="D2Coding"/>
               </a:rPr>
               <a:t>9</a:t>
             </a:r>
@@ -47785,9 +47785,9 @@
                 <a:solidFill>
                   <a:srgbClr val="7A869C"/>
                 </a:solidFill>
-                <a:latin typeface="나눔고딕코딩"/>
-                <a:ea typeface="나눔고딕코딩"/>
-                <a:cs typeface="나눔고딕코딩"/>
+                <a:latin typeface="D2Coding"/>
+                <a:ea typeface="D2Coding"/>
+                <a:cs typeface="D2Coding"/>
               </a:rPr>
               <a:t>10</a:t>
             </a:r>
@@ -47803,9 +47803,9 @@
                 <a:solidFill>
                   <a:srgbClr val="7A869C"/>
                 </a:solidFill>
-                <a:latin typeface="나눔고딕코딩"/>
-                <a:ea typeface="나눔고딕코딩"/>
-                <a:cs typeface="나눔고딕코딩"/>
+                <a:latin typeface="D2Coding"/>
+                <a:ea typeface="D2Coding"/>
+                <a:cs typeface="D2Coding"/>
               </a:rPr>
               <a:t>11</a:t>
             </a:r>
@@ -47844,9 +47844,9 @@
                 <a:solidFill>
                   <a:srgbClr val="E6EAF2"/>
                 </a:solidFill>
-                <a:latin typeface="나눔고딕코딩"/>
-                <a:ea typeface="나눔고딕코딩"/>
-                <a:cs typeface="나눔고딕코딩"/>
+                <a:latin typeface="D2Coding"/>
+                <a:ea typeface="D2Coding"/>
+                <a:cs typeface="D2Coding"/>
               </a:rPr>
               <a:t>CREATE TABLE managers (</a:t>
             </a:r>
@@ -47862,9 +47862,9 @@
                 <a:solidFill>
                   <a:srgbClr val="E6EAF2"/>
                 </a:solidFill>
-                <a:latin typeface="나눔고딕코딩"/>
-                <a:ea typeface="나눔고딕코딩"/>
-                <a:cs typeface="나눔고딕코딩"/>
+                <a:latin typeface="D2Coding"/>
+                <a:ea typeface="D2Coding"/>
+                <a:cs typeface="D2Coding"/>
               </a:rPr>
               <a:t>  mgr_id  CHAR(4)     PRIMARY KEY,</a:t>
             </a:r>
@@ -47880,9 +47880,9 @@
                 <a:solidFill>
                   <a:srgbClr val="E6EAF2"/>
                 </a:solidFill>
-                <a:latin typeface="나눔고딕코딩"/>
-                <a:ea typeface="나눔고딕코딩"/>
-                <a:cs typeface="나눔고딕코딩"/>
+                <a:latin typeface="D2Coding"/>
+                <a:ea typeface="D2Coding"/>
+                <a:cs typeface="D2Coding"/>
               </a:rPr>
               <a:t>  name    VARCHAR(20) NOT NULL,</a:t>
             </a:r>
@@ -47898,9 +47898,9 @@
                 <a:solidFill>
                   <a:srgbClr val="E6EAF2"/>
                 </a:solidFill>
-                <a:latin typeface="나눔고딕코딩"/>
-                <a:ea typeface="나눔고딕코딩"/>
-                <a:cs typeface="나눔고딕코딩"/>
+                <a:latin typeface="D2Coding"/>
+                <a:ea typeface="D2Coding"/>
+                <a:cs typeface="D2Coding"/>
               </a:rPr>
               <a:t>  region  VARCHAR(20) NOT NULL DEFAULT '수도권'</a:t>
             </a:r>
@@ -47916,9 +47916,9 @@
                 <a:solidFill>
                   <a:srgbClr val="E6EAF2"/>
                 </a:solidFill>
-                <a:latin typeface="나눔고딕코딩"/>
-                <a:ea typeface="나눔고딕코딩"/>
-                <a:cs typeface="나눔고딕코딩"/>
+                <a:latin typeface="D2Coding"/>
+                <a:ea typeface="D2Coding"/>
+                <a:cs typeface="D2Coding"/>
               </a:rPr>
               <a:t>);</a:t>
             </a:r>
@@ -47934,9 +47934,9 @@
                 <a:solidFill>
                   <a:srgbClr val="E6EAF2"/>
                 </a:solidFill>
-                <a:latin typeface="나눔고딕코딩"/>
-                <a:ea typeface="나눔고딕코딩"/>
-                <a:cs typeface="나눔고딕코딩"/>
+                <a:latin typeface="D2Coding"/>
+                <a:ea typeface="D2Coding"/>
+                <a:cs typeface="D2Coding"/>
               </a:rPr>
               <a:t/>
             </a:r>
@@ -47952,9 +47952,9 @@
                 <a:solidFill>
                   <a:srgbClr val="E6EAF2"/>
                 </a:solidFill>
-                <a:latin typeface="나눔고딕코딩"/>
-                <a:ea typeface="나눔고딕코딩"/>
-                <a:cs typeface="나눔고딕코딩"/>
+                <a:latin typeface="D2Coding"/>
+                <a:ea typeface="D2Coding"/>
+                <a:cs typeface="D2Coding"/>
               </a:rPr>
               <a:t>ALTER TABLE managers ADD COLUMN phone VARCHAR(20);</a:t>
             </a:r>
@@ -47970,9 +47970,9 @@
                 <a:solidFill>
                   <a:srgbClr val="E6EAF2"/>
                 </a:solidFill>
-                <a:latin typeface="나눔고딕코딩"/>
-                <a:ea typeface="나눔고딕코딩"/>
-                <a:cs typeface="나눔고딕코딩"/>
+                <a:latin typeface="D2Coding"/>
+                <a:ea typeface="D2Coding"/>
+                <a:cs typeface="D2Coding"/>
               </a:rPr>
               <a:t>ALTER TABLE managers MODIFY COLUMN name VARCHAR(40) NOT NULL;</a:t>
             </a:r>
@@ -47988,9 +47988,9 @@
                 <a:solidFill>
                   <a:srgbClr val="E6EAF2"/>
                 </a:solidFill>
-                <a:latin typeface="나눔고딕코딩"/>
-                <a:ea typeface="나눔고딕코딩"/>
-                <a:cs typeface="나눔고딕코딩"/>
+                <a:latin typeface="D2Coding"/>
+                <a:ea typeface="D2Coding"/>
+                <a:cs typeface="D2Coding"/>
               </a:rPr>
               <a:t>ALTER TABLE managers DROP COLUMN phone;</a:t>
             </a:r>
@@ -48006,9 +48006,9 @@
                 <a:solidFill>
                   <a:srgbClr val="E6EAF2"/>
                 </a:solidFill>
-                <a:latin typeface="나눔고딕코딩"/>
-                <a:ea typeface="나눔고딕코딩"/>
-                <a:cs typeface="나눔고딕코딩"/>
+                <a:latin typeface="D2Coding"/>
+                <a:ea typeface="D2Coding"/>
+                <a:cs typeface="D2Coding"/>
               </a:rPr>
               <a:t/>
             </a:r>
@@ -48024,9 +48024,9 @@
                 <a:solidFill>
                   <a:srgbClr val="E6EAF2"/>
                 </a:solidFill>
-                <a:latin typeface="나눔고딕코딩"/>
-                <a:ea typeface="나눔고딕코딩"/>
-                <a:cs typeface="나눔고딕코딩"/>
+                <a:latin typeface="D2Coding"/>
+                <a:ea typeface="D2Coding"/>
+                <a:cs typeface="D2Coding"/>
               </a:rPr>
               <a:t>DROP TABLE managers;</a:t>
             </a:r>
@@ -48530,9 +48530,9 @@
                 <a:solidFill>
                   <a:srgbClr val="7A869C"/>
                 </a:solidFill>
-                <a:latin typeface="나눔고딕코딩"/>
-                <a:ea typeface="나눔고딕코딩"/>
-                <a:cs typeface="나눔고딕코딩"/>
+                <a:latin typeface="D2Coding"/>
+                <a:ea typeface="D2Coding"/>
+                <a:cs typeface="D2Coding"/>
               </a:rPr>
               <a:t>1</a:t>
             </a:r>
@@ -48548,9 +48548,9 @@
                 <a:solidFill>
                   <a:srgbClr val="7A869C"/>
                 </a:solidFill>
-                <a:latin typeface="나눔고딕코딩"/>
-                <a:ea typeface="나눔고딕코딩"/>
-                <a:cs typeface="나눔고딕코딩"/>
+                <a:latin typeface="D2Coding"/>
+                <a:ea typeface="D2Coding"/>
+                <a:cs typeface="D2Coding"/>
               </a:rPr>
               <a:t>2</a:t>
             </a:r>
@@ -48566,9 +48566,9 @@
                 <a:solidFill>
                   <a:srgbClr val="7A869C"/>
                 </a:solidFill>
-                <a:latin typeface="나눔고딕코딩"/>
-                <a:ea typeface="나눔고딕코딩"/>
-                <a:cs typeface="나눔고딕코딩"/>
+                <a:latin typeface="D2Coding"/>
+                <a:ea typeface="D2Coding"/>
+                <a:cs typeface="D2Coding"/>
               </a:rPr>
               <a:t>3</a:t>
             </a:r>
@@ -48584,9 +48584,9 @@
                 <a:solidFill>
                   <a:srgbClr val="7A869C"/>
                 </a:solidFill>
-                <a:latin typeface="나눔고딕코딩"/>
-                <a:ea typeface="나눔고딕코딩"/>
-                <a:cs typeface="나눔고딕코딩"/>
+                <a:latin typeface="D2Coding"/>
+                <a:ea typeface="D2Coding"/>
+                <a:cs typeface="D2Coding"/>
               </a:rPr>
               <a:t>4</a:t>
             </a:r>
@@ -48602,9 +48602,9 @@
                 <a:solidFill>
                   <a:srgbClr val="7A869C"/>
                 </a:solidFill>
-                <a:latin typeface="나눔고딕코딩"/>
-                <a:ea typeface="나눔고딕코딩"/>
-                <a:cs typeface="나눔고딕코딩"/>
+                <a:latin typeface="D2Coding"/>
+                <a:ea typeface="D2Coding"/>
+                <a:cs typeface="D2Coding"/>
               </a:rPr>
               <a:t>5</a:t>
             </a:r>
@@ -48620,9 +48620,9 @@
                 <a:solidFill>
                   <a:srgbClr val="7A869C"/>
                 </a:solidFill>
-                <a:latin typeface="나눔고딕코딩"/>
-                <a:ea typeface="나눔고딕코딩"/>
-                <a:cs typeface="나눔고딕코딩"/>
+                <a:latin typeface="D2Coding"/>
+                <a:ea typeface="D2Coding"/>
+                <a:cs typeface="D2Coding"/>
               </a:rPr>
               <a:t>6</a:t>
             </a:r>
@@ -48638,9 +48638,9 @@
                 <a:solidFill>
                   <a:srgbClr val="7A869C"/>
                 </a:solidFill>
-                <a:latin typeface="나눔고딕코딩"/>
-                <a:ea typeface="나눔고딕코딩"/>
-                <a:cs typeface="나눔고딕코딩"/>
+                <a:latin typeface="D2Coding"/>
+                <a:ea typeface="D2Coding"/>
+                <a:cs typeface="D2Coding"/>
               </a:rPr>
               <a:t>7</a:t>
             </a:r>
@@ -48656,9 +48656,9 @@
                 <a:solidFill>
                   <a:srgbClr val="7A869C"/>
                 </a:solidFill>
-                <a:latin typeface="나눔고딕코딩"/>
-                <a:ea typeface="나눔고딕코딩"/>
-                <a:cs typeface="나눔고딕코딩"/>
+                <a:latin typeface="D2Coding"/>
+                <a:ea typeface="D2Coding"/>
+                <a:cs typeface="D2Coding"/>
               </a:rPr>
               <a:t>8</a:t>
             </a:r>
@@ -48674,9 +48674,9 @@
                 <a:solidFill>
                   <a:srgbClr val="7A869C"/>
                 </a:solidFill>
-                <a:latin typeface="나눔고딕코딩"/>
-                <a:ea typeface="나눔고딕코딩"/>
-                <a:cs typeface="나눔고딕코딩"/>
+                <a:latin typeface="D2Coding"/>
+                <a:ea typeface="D2Coding"/>
+                <a:cs typeface="D2Coding"/>
               </a:rPr>
               <a:t>9</a:t>
             </a:r>
@@ -48692,9 +48692,9 @@
                 <a:solidFill>
                   <a:srgbClr val="7A869C"/>
                 </a:solidFill>
-                <a:latin typeface="나눔고딕코딩"/>
-                <a:ea typeface="나눔고딕코딩"/>
-                <a:cs typeface="나눔고딕코딩"/>
+                <a:latin typeface="D2Coding"/>
+                <a:ea typeface="D2Coding"/>
+                <a:cs typeface="D2Coding"/>
               </a:rPr>
               <a:t>10</a:t>
             </a:r>
@@ -48710,9 +48710,9 @@
                 <a:solidFill>
                   <a:srgbClr val="7A869C"/>
                 </a:solidFill>
-                <a:latin typeface="나눔고딕코딩"/>
-                <a:ea typeface="나눔고딕코딩"/>
-                <a:cs typeface="나눔고딕코딩"/>
+                <a:latin typeface="D2Coding"/>
+                <a:ea typeface="D2Coding"/>
+                <a:cs typeface="D2Coding"/>
               </a:rPr>
               <a:t>11</a:t>
             </a:r>
@@ -48751,9 +48751,9 @@
                 <a:solidFill>
                   <a:srgbClr val="E6EAF2"/>
                 </a:solidFill>
-                <a:latin typeface="나눔고딕코딩"/>
-                <a:ea typeface="나눔고딕코딩"/>
-                <a:cs typeface="나눔고딕코딩"/>
+                <a:latin typeface="D2Coding"/>
+                <a:ea typeface="D2Coding"/>
+                <a:cs typeface="D2Coding"/>
               </a:rPr>
               <a:t>INSERT INTO customers (cust_id, name, joined_date)</a:t>
             </a:r>
@@ -48769,9 +48769,9 @@
                 <a:solidFill>
                   <a:srgbClr val="E6EAF2"/>
                 </a:solidFill>
-                <a:latin typeface="나눔고딕코딩"/>
-                <a:ea typeface="나눔고딕코딩"/>
-                <a:cs typeface="나눔고딕코딩"/>
+                <a:latin typeface="D2Coding"/>
+                <a:ea typeface="D2Coding"/>
+                <a:cs typeface="D2Coding"/>
               </a:rPr>
               <a:t>VALUES ('C011', '이도윤', '2026-08-01');</a:t>
             </a:r>
@@ -48787,9 +48787,9 @@
                 <a:solidFill>
                   <a:srgbClr val="E6EAF2"/>
                 </a:solidFill>
-                <a:latin typeface="나눔고딕코딩"/>
-                <a:ea typeface="나눔고딕코딩"/>
-                <a:cs typeface="나눔고딕코딩"/>
+                <a:latin typeface="D2Coding"/>
+                <a:ea typeface="D2Coding"/>
+                <a:cs typeface="D2Coding"/>
               </a:rPr>
               <a:t/>
             </a:r>
@@ -48805,9 +48805,9 @@
                 <a:solidFill>
                   <a:srgbClr val="E6EAF2"/>
                 </a:solidFill>
-                <a:latin typeface="나눔고딕코딩"/>
-                <a:ea typeface="나눔고딕코딩"/>
-                <a:cs typeface="나눔고딕코딩"/>
+                <a:latin typeface="D2Coding"/>
+                <a:ea typeface="D2Coding"/>
+                <a:cs typeface="D2Coding"/>
               </a:rPr>
               <a:t>UPDATE customers SET points = points + 500</a:t>
             </a:r>
@@ -48823,9 +48823,9 @@
                 <a:solidFill>
                   <a:srgbClr val="E6EAF2"/>
                 </a:solidFill>
-                <a:latin typeface="나눔고딕코딩"/>
-                <a:ea typeface="나눔고딕코딩"/>
-                <a:cs typeface="나눔고딕코딩"/>
+                <a:latin typeface="D2Coding"/>
+                <a:ea typeface="D2Coding"/>
+                <a:cs typeface="D2Coding"/>
               </a:rPr>
               <a:t>WHERE  cust_id = 'C011';</a:t>
             </a:r>
@@ -48841,9 +48841,9 @@
                 <a:solidFill>
                   <a:srgbClr val="E6EAF2"/>
                 </a:solidFill>
-                <a:latin typeface="나눔고딕코딩"/>
-                <a:ea typeface="나눔고딕코딩"/>
-                <a:cs typeface="나눔고딕코딩"/>
+                <a:latin typeface="D2Coding"/>
+                <a:ea typeface="D2Coding"/>
+                <a:cs typeface="D2Coding"/>
               </a:rPr>
               <a:t/>
             </a:r>
@@ -48859,9 +48859,9 @@
                 <a:solidFill>
                   <a:srgbClr val="E6EAF2"/>
                 </a:solidFill>
-                <a:latin typeface="나눔고딕코딩"/>
-                <a:ea typeface="나눔고딕코딩"/>
-                <a:cs typeface="나눔고딕코딩"/>
+                <a:latin typeface="D2Coding"/>
+                <a:ea typeface="D2Coding"/>
+                <a:cs typeface="D2Coding"/>
               </a:rPr>
               <a:t>DELETE FROM customers WHERE cust_id = 'C011';</a:t>
             </a:r>
@@ -48877,9 +48877,9 @@
                 <a:solidFill>
                   <a:srgbClr val="E6EAF2"/>
                 </a:solidFill>
-                <a:latin typeface="나눔고딕코딩"/>
-                <a:ea typeface="나눔고딕코딩"/>
-                <a:cs typeface="나눔고딕코딩"/>
+                <a:latin typeface="D2Coding"/>
+                <a:ea typeface="D2Coding"/>
+                <a:cs typeface="D2Coding"/>
               </a:rPr>
               <a:t/>
             </a:r>
@@ -48895,9 +48895,9 @@
                 <a:solidFill>
                   <a:srgbClr val="E6EAF2"/>
                 </a:solidFill>
-                <a:latin typeface="나눔고딕코딩"/>
-                <a:ea typeface="나눔고딕코딩"/>
-                <a:cs typeface="나눔고딕코딩"/>
+                <a:latin typeface="D2Coding"/>
+                <a:ea typeface="D2Coding"/>
+                <a:cs typeface="D2Coding"/>
               </a:rPr>
               <a:t>START TRANSACTION;</a:t>
             </a:r>
@@ -48913,9 +48913,9 @@
                 <a:solidFill>
                   <a:srgbClr val="E6EAF2"/>
                 </a:solidFill>
-                <a:latin typeface="나눔고딕코딩"/>
-                <a:ea typeface="나눔고딕코딩"/>
-                <a:cs typeface="나눔고딕코딩"/>
+                <a:latin typeface="D2Coding"/>
+                <a:ea typeface="D2Coding"/>
+                <a:cs typeface="D2Coding"/>
               </a:rPr>
               <a:t>UPDATE products SET stock = stock - 1 WHERE prod_id = 'P001';</a:t>
             </a:r>
@@ -48931,9 +48931,9 @@
                 <a:solidFill>
                   <a:srgbClr val="E6EAF2"/>
                 </a:solidFill>
-                <a:latin typeface="나눔고딕코딩"/>
-                <a:ea typeface="나눔고딕코딩"/>
-                <a:cs typeface="나눔고딕코딩"/>
+                <a:latin typeface="D2Coding"/>
+                <a:ea typeface="D2Coding"/>
+                <a:cs typeface="D2Coding"/>
               </a:rPr>
               <a:t>COMMIT;</a:t>
             </a:r>
@@ -49857,9 +49857,9 @@
                 <a:solidFill>
                   <a:srgbClr val="7A869C"/>
                 </a:solidFill>
-                <a:latin typeface="나눔고딕코딩"/>
-                <a:ea typeface="나눔고딕코딩"/>
-                <a:cs typeface="나눔고딕코딩"/>
+                <a:latin typeface="D2Coding"/>
+                <a:ea typeface="D2Coding"/>
+                <a:cs typeface="D2Coding"/>
               </a:rPr>
               <a:t>1</a:t>
             </a:r>
@@ -49875,9 +49875,9 @@
                 <a:solidFill>
                   <a:srgbClr val="7A869C"/>
                 </a:solidFill>
-                <a:latin typeface="나눔고딕코딩"/>
-                <a:ea typeface="나눔고딕코딩"/>
-                <a:cs typeface="나눔고딕코딩"/>
+                <a:latin typeface="D2Coding"/>
+                <a:ea typeface="D2Coding"/>
+                <a:cs typeface="D2Coding"/>
               </a:rPr>
               <a:t>2</a:t>
             </a:r>
@@ -49893,9 +49893,9 @@
                 <a:solidFill>
                   <a:srgbClr val="7A869C"/>
                 </a:solidFill>
-                <a:latin typeface="나눔고딕코딩"/>
-                <a:ea typeface="나눔고딕코딩"/>
-                <a:cs typeface="나눔고딕코딩"/>
+                <a:latin typeface="D2Coding"/>
+                <a:ea typeface="D2Coding"/>
+                <a:cs typeface="D2Coding"/>
               </a:rPr>
               <a:t>3</a:t>
             </a:r>
@@ -49911,9 +49911,9 @@
                 <a:solidFill>
                   <a:srgbClr val="7A869C"/>
                 </a:solidFill>
-                <a:latin typeface="나눔고딕코딩"/>
-                <a:ea typeface="나눔고딕코딩"/>
-                <a:cs typeface="나눔고딕코딩"/>
+                <a:latin typeface="D2Coding"/>
+                <a:ea typeface="D2Coding"/>
+                <a:cs typeface="D2Coding"/>
               </a:rPr>
               <a:t>4</a:t>
             </a:r>
@@ -49929,9 +49929,9 @@
                 <a:solidFill>
                   <a:srgbClr val="7A869C"/>
                 </a:solidFill>
-                <a:latin typeface="나눔고딕코딩"/>
-                <a:ea typeface="나눔고딕코딩"/>
-                <a:cs typeface="나눔고딕코딩"/>
+                <a:latin typeface="D2Coding"/>
+                <a:ea typeface="D2Coding"/>
+                <a:cs typeface="D2Coding"/>
               </a:rPr>
               <a:t>5</a:t>
             </a:r>
@@ -49947,9 +49947,9 @@
                 <a:solidFill>
                   <a:srgbClr val="7A869C"/>
                 </a:solidFill>
-                <a:latin typeface="나눔고딕코딩"/>
-                <a:ea typeface="나눔고딕코딩"/>
-                <a:cs typeface="나눔고딕코딩"/>
+                <a:latin typeface="D2Coding"/>
+                <a:ea typeface="D2Coding"/>
+                <a:cs typeface="D2Coding"/>
               </a:rPr>
               <a:t>6</a:t>
             </a:r>
@@ -49965,9 +49965,9 @@
                 <a:solidFill>
                   <a:srgbClr val="7A869C"/>
                 </a:solidFill>
-                <a:latin typeface="나눔고딕코딩"/>
-                <a:ea typeface="나눔고딕코딩"/>
-                <a:cs typeface="나눔고딕코딩"/>
+                <a:latin typeface="D2Coding"/>
+                <a:ea typeface="D2Coding"/>
+                <a:cs typeface="D2Coding"/>
               </a:rPr>
               <a:t>7</a:t>
             </a:r>
@@ -49983,9 +49983,9 @@
                 <a:solidFill>
                   <a:srgbClr val="7A869C"/>
                 </a:solidFill>
-                <a:latin typeface="나눔고딕코딩"/>
-                <a:ea typeface="나눔고딕코딩"/>
-                <a:cs typeface="나눔고딕코딩"/>
+                <a:latin typeface="D2Coding"/>
+                <a:ea typeface="D2Coding"/>
+                <a:cs typeface="D2Coding"/>
               </a:rPr>
               <a:t>8</a:t>
             </a:r>
@@ -50001,9 +50001,9 @@
                 <a:solidFill>
                   <a:srgbClr val="7A869C"/>
                 </a:solidFill>
-                <a:latin typeface="나눔고딕코딩"/>
-                <a:ea typeface="나눔고딕코딩"/>
-                <a:cs typeface="나눔고딕코딩"/>
+                <a:latin typeface="D2Coding"/>
+                <a:ea typeface="D2Coding"/>
+                <a:cs typeface="D2Coding"/>
               </a:rPr>
               <a:t>9</a:t>
             </a:r>
@@ -50019,9 +50019,9 @@
                 <a:solidFill>
                   <a:srgbClr val="7A869C"/>
                 </a:solidFill>
-                <a:latin typeface="나눔고딕코딩"/>
-                <a:ea typeface="나눔고딕코딩"/>
-                <a:cs typeface="나눔고딕코딩"/>
+                <a:latin typeface="D2Coding"/>
+                <a:ea typeface="D2Coding"/>
+                <a:cs typeface="D2Coding"/>
               </a:rPr>
               <a:t>10</a:t>
             </a:r>
@@ -50060,9 +50060,9 @@
                 <a:solidFill>
                   <a:srgbClr val="E6EAF2"/>
                 </a:solidFill>
-                <a:latin typeface="나눔고딕코딩"/>
-                <a:ea typeface="나눔고딕코딩"/>
-                <a:cs typeface="나눔고딕코딩"/>
+                <a:latin typeface="D2Coding"/>
+                <a:ea typeface="D2Coding"/>
+                <a:cs typeface="D2Coding"/>
               </a:rPr>
               <a:t>SELECT name, price</a:t>
             </a:r>
@@ -50078,9 +50078,9 @@
                 <a:solidFill>
                   <a:srgbClr val="E6EAF2"/>
                 </a:solidFill>
-                <a:latin typeface="나눔고딕코딩"/>
-                <a:ea typeface="나눔고딕코딩"/>
-                <a:cs typeface="나눔고딕코딩"/>
+                <a:latin typeface="D2Coding"/>
+                <a:ea typeface="D2Coding"/>
+                <a:cs typeface="D2Coding"/>
               </a:rPr>
               <a:t>FROM   products</a:t>
             </a:r>
@@ -50096,9 +50096,9 @@
                 <a:solidFill>
                   <a:srgbClr val="E6EAF2"/>
                 </a:solidFill>
-                <a:latin typeface="나눔고딕코딩"/>
-                <a:ea typeface="나눔고딕코딩"/>
-                <a:cs typeface="나눔고딕코딩"/>
+                <a:latin typeface="D2Coding"/>
+                <a:ea typeface="D2Coding"/>
+                <a:cs typeface="D2Coding"/>
               </a:rPr>
               <a:t>WHERE  category = '가전' AND price &gt;= 40000</a:t>
             </a:r>
@@ -50114,9 +50114,9 @@
                 <a:solidFill>
                   <a:srgbClr val="E6EAF2"/>
                 </a:solidFill>
-                <a:latin typeface="나눔고딕코딩"/>
-                <a:ea typeface="나눔고딕코딩"/>
-                <a:cs typeface="나눔고딕코딩"/>
+                <a:latin typeface="D2Coding"/>
+                <a:ea typeface="D2Coding"/>
+                <a:cs typeface="D2Coding"/>
               </a:rPr>
               <a:t>ORDER  BY price DESC</a:t>
             </a:r>
@@ -50132,9 +50132,9 @@
                 <a:solidFill>
                   <a:srgbClr val="E6EAF2"/>
                 </a:solidFill>
-                <a:latin typeface="나눔고딕코딩"/>
-                <a:ea typeface="나눔고딕코딩"/>
-                <a:cs typeface="나눔고딕코딩"/>
+                <a:latin typeface="D2Coding"/>
+                <a:ea typeface="D2Coding"/>
+                <a:cs typeface="D2Coding"/>
               </a:rPr>
               <a:t>LIMIT  5;</a:t>
             </a:r>
@@ -50150,9 +50150,9 @@
                 <a:solidFill>
                   <a:srgbClr val="E6EAF2"/>
                 </a:solidFill>
-                <a:latin typeface="나눔고딕코딩"/>
-                <a:ea typeface="나눔고딕코딩"/>
-                <a:cs typeface="나눔고딕코딩"/>
+                <a:latin typeface="D2Coding"/>
+                <a:ea typeface="D2Coding"/>
+                <a:cs typeface="D2Coding"/>
               </a:rPr>
               <a:t/>
             </a:r>
@@ -50168,9 +50168,9 @@
                 <a:solidFill>
                   <a:srgbClr val="E6EAF2"/>
                 </a:solidFill>
-                <a:latin typeface="나눔고딕코딩"/>
-                <a:ea typeface="나눔고딕코딩"/>
-                <a:cs typeface="나눔고딕코딩"/>
+                <a:latin typeface="D2Coding"/>
+                <a:ea typeface="D2Coding"/>
+                <a:cs typeface="D2Coding"/>
               </a:rPr>
               <a:t>WHERE name LIKE '%세트%'</a:t>
             </a:r>
@@ -50186,9 +50186,9 @@
                 <a:solidFill>
                   <a:srgbClr val="E6EAF2"/>
                 </a:solidFill>
-                <a:latin typeface="나눔고딕코딩"/>
-                <a:ea typeface="나눔고딕코딩"/>
-                <a:cs typeface="나눔고딕코딩"/>
+                <a:latin typeface="D2Coding"/>
+                <a:ea typeface="D2Coding"/>
+                <a:cs typeface="D2Coding"/>
               </a:rPr>
               <a:t>WHERE price BETWEEN 10000 AND 50000</a:t>
             </a:r>
@@ -50204,9 +50204,9 @@
                 <a:solidFill>
                   <a:srgbClr val="E6EAF2"/>
                 </a:solidFill>
-                <a:latin typeface="나눔고딕코딩"/>
-                <a:ea typeface="나눔고딕코딩"/>
-                <a:cs typeface="나눔고딕코딩"/>
+                <a:latin typeface="D2Coding"/>
+                <a:ea typeface="D2Coding"/>
+                <a:cs typeface="D2Coding"/>
               </a:rPr>
               <a:t>WHERE grade IN ('VIP', 'GOLD')</a:t>
             </a:r>
@@ -50222,9 +50222,9 @@
                 <a:solidFill>
                   <a:srgbClr val="E6EAF2"/>
                 </a:solidFill>
-                <a:latin typeface="나눔고딕코딩"/>
-                <a:ea typeface="나눔고딕코딩"/>
-                <a:cs typeface="나눔고딕코딩"/>
+                <a:latin typeface="D2Coding"/>
+                <a:ea typeface="D2Coding"/>
+                <a:cs typeface="D2Coding"/>
               </a:rPr>
               <a:t>WHERE email IS NULL</a:t>
             </a:r>
